--- a/competition/GOAI-初赛方案-折返治理Switchback.pptx
+++ b/competition/GOAI-初赛方案-折返治理Switchback.pptx
@@ -9756,7 +9756,7 @@
                 </a:solidFill>
                 <a:latin typeface="Microsoft YaHei"/>
               </a:rPr>
-              <a:t>Python 3.10+ 零依赖可运行 · 23 项 pytest 全绿 · GitHub Actions CI（3.10/3.11/3.12）· CLI 一键复现</a:t>
+              <a:t>Python 3.10+ 零依赖可运行 · 38 项 pytest 全绿 · GitHub Actions CI（3.10/3.11/3.12）· CLI 一键复现</a:t>
             </a:r>
           </a:p>
         </p:txBody>

--- a/competition/GOAI-初赛方案-折返治理Switchback.pptx
+++ b/competition/GOAI-初赛方案-折返治理Switchback.pptx
@@ -9756,7 +9756,7 @@
                 </a:solidFill>
                 <a:latin typeface="Microsoft YaHei"/>
               </a:rPr>
-              <a:t>Python 3.10+ 零依赖可运行 · 38 项 pytest 全绿 · GitHub Actions CI（3.10/3.11/3.12）· CLI 一键复现</a:t>
+              <a:t>Python 3.10+ 零依赖可运行 · 43 项 pytest 全绿 · GitHub Actions CI（3.10/3.11/3.12）· CLI 一键复现</a:t>
             </a:r>
           </a:p>
         </p:txBody>
